--- a/renderer/templates/Template.pptx
+++ b/renderer/templates/Template.pptx
@@ -42,7 +42,7 @@
         <p:spPr>
           <a:xfrm>
             <a:off x="504000" y="301320"/>
-            <a:ext cx="9071640" cy="1261800"/>
+            <a:ext cx="9071280" cy="1261440"/>
           </a:xfrm>
           <a:prstGeom prst="rect">
             <a:avLst/>
@@ -60,9 +60,9 @@
             <a:pPr indent="0" algn="ctr">
               <a:buNone/>
             </a:pPr>
-            <a:endParaRPr b="0" lang="en-CA" sz="5860" spc="-1" strike="noStrike">
-              <a:solidFill>
-                <a:srgbClr val="ffffff"/>
+            <a:endParaRPr b="0" lang="en-CA" sz="4400" spc="-1" strike="noStrike">
+              <a:solidFill>
+                <a:srgbClr val="000000"/>
               </a:solidFill>
               <a:latin typeface="Arial"/>
             </a:endParaRPr>
@@ -82,7 +82,7 @@
         <p:spPr>
           <a:xfrm>
             <a:off x="504000" y="1768680"/>
-            <a:ext cx="9071640" cy="4384440"/>
+            <a:ext cx="9072000" cy="4384080"/>
           </a:xfrm>
           <a:prstGeom prst="rect">
             <a:avLst/>
@@ -102,7 +102,7 @@
             </a:pPr>
             <a:endParaRPr b="0" lang="en-CA" sz="3200" spc="-1" strike="noStrike">
               <a:solidFill>
-                <a:srgbClr val="ffffff"/>
+                <a:srgbClr val="000000"/>
               </a:solidFill>
               <a:latin typeface="Arial"/>
             </a:endParaRPr>
@@ -116,7 +116,7 @@
             <a:spLocks noGrp="1"/>
           </p:cNvSpPr>
           <p:nvPr>
-            <p:ph type="ftr" idx="2"/>
+            <p:ph type="ftr" idx="1"/>
           </p:nvPr>
         </p:nvSpPr>
         <p:spPr/>
@@ -136,14 +136,14 @@
             <a:spLocks noGrp="1"/>
           </p:cNvSpPr>
           <p:nvPr>
-            <p:ph type="sldNum" idx="3"/>
+            <p:ph type="sldNum" idx="2"/>
           </p:nvPr>
         </p:nvSpPr>
         <p:spPr/>
         <p:txBody>
           <a:bodyPr/>
           <a:p>
-            <a:fld id="{48F6E903-68F0-47D2-97FC-67E9FDB613C3}" type="slidenum">
+            <a:fld id="{04C7C6E8-229A-4233-84DB-DA461D7DDF57}" type="slidenum">
               <a:t>&lt;#&gt;</a:t>
             </a:fld>
           </a:p>
@@ -156,7 +156,90 @@
             <a:spLocks noGrp="1"/>
           </p:cNvSpPr>
           <p:nvPr>
-            <p:ph type="dt" idx="1"/>
+            <p:ph type="dt" idx="3"/>
+          </p:nvPr>
+        </p:nvSpPr>
+        <p:spPr/>
+        <p:txBody>
+          <a:bodyPr/>
+          <a:p>
+            <a:r>
+              <a:rPr lang="en-CA"/>
+              <a:t/>
+            </a:r>
+          </a:p>
+        </p:txBody>
+      </p:sp>
+    </p:spTree>
+  </p:cSld>
+</p:sldLayout>
+</file>
+
+<file path=ppt/slideLayouts/slideLayout2.xml><?xml version="1.0" encoding="utf-8"?>
+<p:sldLayout xmlns:a="http://schemas.openxmlformats.org/drawingml/2006/main" xmlns:p="http://schemas.openxmlformats.org/presentationml/2006/main" xmlns:r="http://schemas.openxmlformats.org/officeDocument/2006/relationships" xmlns:p14="http://schemas.microsoft.com/office/powerpoint/2010/main" xmlns:p15="http://schemas.microsoft.com/office/powerpoint/2012/main" xmlns:mc="http://schemas.openxmlformats.org/markup-compatibility/2006" type="blank" preserve="1">
+  <p:cSld name="Default">
+    <p:spTree>
+      <p:nvGrpSpPr>
+        <p:cNvPr id="1" name=""/>
+        <p:cNvGrpSpPr/>
+        <p:nvPr/>
+      </p:nvGrpSpPr>
+      <p:grpSpPr>
+        <a:xfrm>
+          <a:off x="0" y="0"/>
+          <a:ext cx="0" cy="0"/>
+          <a:chOff x="0" y="0"/>
+          <a:chExt cx="0" cy="0"/>
+        </a:xfrm>
+      </p:grpSpPr>
+      <p:sp>
+        <p:nvSpPr>
+          <p:cNvPr id="2" name="PlaceHolder 1"/>
+          <p:cNvSpPr>
+            <a:spLocks noGrp="1"/>
+          </p:cNvSpPr>
+          <p:nvPr>
+            <p:ph type="ftr" idx="1"/>
+          </p:nvPr>
+        </p:nvSpPr>
+        <p:spPr/>
+        <p:txBody>
+          <a:bodyPr/>
+          <a:p>
+            <a:r>
+              <a:t>Footer</a:t>
+            </a:r>
+          </a:p>
+        </p:txBody>
+      </p:sp>
+      <p:sp>
+        <p:nvSpPr>
+          <p:cNvPr id="3" name="PlaceHolder 2"/>
+          <p:cNvSpPr>
+            <a:spLocks noGrp="1"/>
+          </p:cNvSpPr>
+          <p:nvPr>
+            <p:ph type="sldNum" idx="2"/>
+          </p:nvPr>
+        </p:nvSpPr>
+        <p:spPr/>
+        <p:txBody>
+          <a:bodyPr/>
+          <a:p>
+            <a:fld id="{BE4782B8-1BF3-40F7-97EE-75290F9931BE}" type="slidenum">
+              <a:t>&lt;#&gt;</a:t>
+            </a:fld>
+          </a:p>
+        </p:txBody>
+      </p:sp>
+      <p:sp>
+        <p:nvSpPr>
+          <p:cNvPr id="4" name="PlaceHolder 3"/>
+          <p:cNvSpPr>
+            <a:spLocks noGrp="1"/>
+          </p:cNvSpPr>
+          <p:nvPr>
+            <p:ph type="dt" idx="3"/>
           </p:nvPr>
         </p:nvSpPr>
         <p:spPr/>
@@ -182,14 +265,17 @@
       <p:bgPr>
         <a:gradFill rotWithShape="0">
           <a:gsLst>
-            <a:gs pos="9000">
-              <a:srgbClr val="c2c2c2"/>
+            <a:gs pos="9500">
+              <a:srgbClr val="dddddd"/>
             </a:gs>
-            <a:gs pos="100000">
-              <a:srgbClr val="666666"/>
+            <a:gs pos="50000">
+              <a:srgbClr val="858585"/>
+            </a:gs>
+            <a:gs pos="90500">
+              <a:srgbClr val="dddddd"/>
             </a:gs>
           </a:gsLst>
-          <a:lin ang="14160000"/>
+          <a:lin ang="17700000"/>
         </a:gradFill>
       </p:bgPr>
     </p:bg>
@@ -207,9 +293,32 @@
           <a:chExt cx="0" cy="0"/>
         </a:xfrm>
       </p:grpSpPr>
-      <p:sp>
-        <p:nvSpPr>
-          <p:cNvPr id="0" name="PlaceHolder 1"/>
+      <p:pic>
+        <p:nvPicPr>
+          <p:cNvPr id="0" name="" descr=""/>
+          <p:cNvPicPr/>
+          <p:nvPr/>
+        </p:nvPicPr>
+        <p:blipFill>
+          <a:blip r:embed="rId2"/>
+          <a:stretch/>
+        </p:blipFill>
+        <p:spPr>
+          <a:xfrm>
+            <a:off x="8780400" y="6543720"/>
+            <a:ext cx="939240" cy="655920"/>
+          </a:xfrm>
+          <a:prstGeom prst="rect">
+            <a:avLst/>
+          </a:prstGeom>
+          <a:ln w="0">
+            <a:noFill/>
+          </a:ln>
+        </p:spPr>
+      </p:pic>
+      <p:sp>
+        <p:nvSpPr>
+          <p:cNvPr id="1" name="PlaceHolder 1"/>
           <p:cNvSpPr>
             <a:spLocks noGrp="1"/>
           </p:cNvSpPr>
@@ -220,7 +329,7 @@
         <p:spPr>
           <a:xfrm>
             <a:off x="504000" y="301320"/>
-            <a:ext cx="9071640" cy="1261800"/>
+            <a:ext cx="9071280" cy="1261440"/>
           </a:xfrm>
           <a:prstGeom prst="rect">
             <a:avLst/>
@@ -235,21 +344,21 @@
             <a:noAutofit/>
           </a:bodyPr>
           <a:p>
-            <a:pPr indent="0" algn="ctr">
+            <a:pPr indent="0">
               <a:buNone/>
             </a:pPr>
             <a:r>
-              <a:rPr b="0" lang="en-CA" sz="5860" spc="-1" strike="noStrike">
-                <a:solidFill>
-                  <a:srgbClr val="ffffff"/>
+              <a:rPr b="0" lang="en-CA" sz="1800" spc="-1" strike="noStrike">
+                <a:solidFill>
+                  <a:srgbClr val="000000"/>
                 </a:solidFill>
                 <a:latin typeface="Arial"/>
               </a:rPr>
               <a:t>Click to edit the title text format</a:t>
             </a:r>
-            <a:endParaRPr b="0" lang="en-CA" sz="5860" spc="-1" strike="noStrike">
-              <a:solidFill>
-                <a:srgbClr val="ffffff"/>
+            <a:endParaRPr b="0" lang="en-CA" sz="1800" spc="-1" strike="noStrike">
+              <a:solidFill>
+                <a:srgbClr val="000000"/>
               </a:solidFill>
               <a:latin typeface="Arial"/>
             </a:endParaRPr>
@@ -258,18 +367,18 @@
       </p:sp>
       <p:sp>
         <p:nvSpPr>
-          <p:cNvPr id="1" name="PlaceHolder 2"/>
-          <p:cNvSpPr>
-            <a:spLocks noGrp="1"/>
-          </p:cNvSpPr>
-          <p:nvPr>
-            <p:ph type="body"/>
+          <p:cNvPr id="2" name="PlaceHolder 2"/>
+          <p:cNvSpPr>
+            <a:spLocks noGrp="1"/>
+          </p:cNvSpPr>
+          <p:nvPr>
+            <p:ph type="ftr" idx="1"/>
           </p:nvPr>
         </p:nvSpPr>
         <p:spPr>
           <a:xfrm>
-            <a:off x="504000" y="1768680"/>
-            <a:ext cx="9071640" cy="4384440"/>
+            <a:off x="3447360" y="6886800"/>
+            <a:ext cx="3194640" cy="520560"/>
           </a:xfrm>
           <a:prstGeom prst="rect">
             <a:avLst/>
@@ -281,220 +390,67 @@
         </p:spPr>
         <p:txBody>
           <a:bodyPr lIns="0" rIns="0" tIns="0" bIns="0" anchor="t">
-            <a:normAutofit/>
+            <a:noAutofit/>
           </a:bodyPr>
-          <a:p>
-            <a:pPr marL="432000" indent="-324000">
-              <a:spcBef>
-                <a:spcPts val="1888"/>
-              </a:spcBef>
-              <a:buClr>
-                <a:srgbClr val="ffffff"/>
-              </a:buClr>
-              <a:buSzPct val="45000"/>
-              <a:buFont typeface="Wingdings" charset="2"/>
-              <a:buChar char=""/>
-            </a:pPr>
-            <a:r>
-              <a:rPr b="0" lang="en-CA" sz="4270" spc="-1" strike="noStrike">
-                <a:solidFill>
-                  <a:srgbClr val="ffffff"/>
-                </a:solidFill>
-                <a:latin typeface="Arial"/>
-              </a:rPr>
-              <a:t>Click to edit the outline text format</a:t>
-            </a:r>
-            <a:endParaRPr b="0" lang="en-CA" sz="4270" spc="-1" strike="noStrike">
-              <a:solidFill>
-                <a:srgbClr val="ffffff"/>
-              </a:solidFill>
-              <a:latin typeface="Arial"/>
-            </a:endParaRPr>
-          </a:p>
-          <a:p>
-            <a:pPr lvl="1" marL="864000" indent="-324000">
-              <a:spcBef>
-                <a:spcPts val="1511"/>
-              </a:spcBef>
-              <a:buClr>
-                <a:srgbClr val="ffffff"/>
-              </a:buClr>
-              <a:buSzPct val="75000"/>
-              <a:buFont typeface="Symbol" charset="2"/>
-              <a:buChar char=""/>
-            </a:pPr>
-            <a:r>
-              <a:rPr b="0" lang="en-CA" sz="3730" spc="-1" strike="noStrike">
-                <a:solidFill>
-                  <a:srgbClr val="ffffff"/>
-                </a:solidFill>
-                <a:latin typeface="Arial"/>
-              </a:rPr>
-              <a:t>Second Outline Level</a:t>
-            </a:r>
-            <a:endParaRPr b="0" lang="en-CA" sz="3730" spc="-1" strike="noStrike">
-              <a:solidFill>
-                <a:srgbClr val="ffffff"/>
-              </a:solidFill>
-              <a:latin typeface="Arial"/>
-            </a:endParaRPr>
-          </a:p>
-          <a:p>
-            <a:pPr lvl="2" marL="1296000" indent="-288000">
-              <a:spcBef>
-                <a:spcPts val="1131"/>
-              </a:spcBef>
-              <a:buClr>
-                <a:srgbClr val="ffffff"/>
-              </a:buClr>
-              <a:buSzPct val="45000"/>
-              <a:buFont typeface="Wingdings" charset="2"/>
-              <a:buChar char=""/>
-            </a:pPr>
-            <a:r>
-              <a:rPr b="0" lang="en-CA" sz="3200" spc="-1" strike="noStrike">
-                <a:solidFill>
-                  <a:srgbClr val="ffffff"/>
-                </a:solidFill>
-                <a:latin typeface="Arial"/>
-              </a:rPr>
-              <a:t>Third Outline Level</a:t>
-            </a:r>
-            <a:endParaRPr b="0" lang="en-CA" sz="3200" spc="-1" strike="noStrike">
-              <a:solidFill>
-                <a:srgbClr val="ffffff"/>
-              </a:solidFill>
-              <a:latin typeface="Arial"/>
-            </a:endParaRPr>
-          </a:p>
-          <a:p>
-            <a:pPr lvl="3" marL="1728000" indent="-216000">
-              <a:spcBef>
-                <a:spcPts val="754"/>
-              </a:spcBef>
-              <a:buClr>
-                <a:srgbClr val="ffffff"/>
-              </a:buClr>
-              <a:buSzPct val="75000"/>
-              <a:buFont typeface="Symbol" charset="2"/>
-              <a:buChar char=""/>
-            </a:pPr>
-            <a:r>
-              <a:rPr b="0" lang="en-CA" sz="2670" spc="-1" strike="noStrike">
-                <a:solidFill>
-                  <a:srgbClr val="ffffff"/>
-                </a:solidFill>
-                <a:latin typeface="Arial"/>
-              </a:rPr>
-              <a:t>Fourth Outline Level</a:t>
-            </a:r>
-            <a:endParaRPr b="0" lang="en-CA" sz="2670" spc="-1" strike="noStrike">
-              <a:solidFill>
-                <a:srgbClr val="ffffff"/>
-              </a:solidFill>
-              <a:latin typeface="Arial"/>
-            </a:endParaRPr>
-          </a:p>
-          <a:p>
-            <a:pPr lvl="4" marL="2160000" indent="-216000">
-              <a:spcBef>
-                <a:spcPts val="377"/>
-              </a:spcBef>
-              <a:buClr>
-                <a:srgbClr val="ffffff"/>
-              </a:buClr>
-              <a:buSzPct val="45000"/>
-              <a:buFont typeface="Wingdings" charset="2"/>
-              <a:buChar char=""/>
-            </a:pPr>
-            <a:r>
-              <a:rPr b="0" lang="en-CA" sz="2670" spc="-1" strike="noStrike">
-                <a:solidFill>
-                  <a:srgbClr val="ffffff"/>
-                </a:solidFill>
-                <a:latin typeface="Arial"/>
-              </a:rPr>
-              <a:t>Fifth Outline Level</a:t>
-            </a:r>
-            <a:endParaRPr b="0" lang="en-CA" sz="2670" spc="-1" strike="noStrike">
-              <a:solidFill>
-                <a:srgbClr val="ffffff"/>
-              </a:solidFill>
-              <a:latin typeface="Arial"/>
-            </a:endParaRPr>
-          </a:p>
-          <a:p>
-            <a:pPr lvl="5" marL="2592000" indent="-216000">
-              <a:spcBef>
-                <a:spcPts val="377"/>
-              </a:spcBef>
-              <a:buClr>
-                <a:srgbClr val="ffffff"/>
-              </a:buClr>
-              <a:buSzPct val="45000"/>
-              <a:buFont typeface="Wingdings" charset="2"/>
-              <a:buChar char=""/>
-            </a:pPr>
-            <a:r>
-              <a:rPr b="0" lang="en-CA" sz="2670" spc="-1" strike="noStrike">
-                <a:solidFill>
-                  <a:srgbClr val="ffffff"/>
-                </a:solidFill>
-                <a:latin typeface="Arial"/>
-              </a:rPr>
-              <a:t>Sixth Outline Level</a:t>
-            </a:r>
-            <a:endParaRPr b="0" lang="en-CA" sz="2670" spc="-1" strike="noStrike">
-              <a:solidFill>
-                <a:srgbClr val="ffffff"/>
-              </a:solidFill>
-              <a:latin typeface="Arial"/>
-            </a:endParaRPr>
-          </a:p>
-          <a:p>
-            <a:pPr lvl="6" marL="3024000" indent="-216000">
-              <a:spcBef>
-                <a:spcPts val="377"/>
-              </a:spcBef>
-              <a:buClr>
-                <a:srgbClr val="ffffff"/>
-              </a:buClr>
-              <a:buSzPct val="45000"/>
-              <a:buFont typeface="Wingdings" charset="2"/>
-              <a:buChar char=""/>
-            </a:pPr>
-            <a:r>
-              <a:rPr b="0" lang="en-CA" sz="2670" spc="-1" strike="noStrike">
-                <a:solidFill>
-                  <a:srgbClr val="ffffff"/>
-                </a:solidFill>
-                <a:latin typeface="Arial"/>
-              </a:rPr>
-              <a:t>Seventh Outline Level</a:t>
-            </a:r>
-            <a:endParaRPr b="0" lang="en-CA" sz="2670" spc="-1" strike="noStrike">
-              <a:solidFill>
-                <a:srgbClr val="ffffff"/>
-              </a:solidFill>
-              <a:latin typeface="Arial"/>
-            </a:endParaRPr>
-          </a:p>
-        </p:txBody>
-      </p:sp>
-      <p:sp>
-        <p:nvSpPr>
-          <p:cNvPr id="2" name="PlaceHolder 3"/>
-          <p:cNvSpPr>
-            <a:spLocks noGrp="1"/>
-          </p:cNvSpPr>
-          <p:nvPr>
-            <p:ph type="dt" idx="1"/>
+          <a:lstStyle>
+            <a:lvl1pPr indent="0" algn="ctr">
+              <a:lnSpc>
+                <a:spcPct val="100000"/>
+              </a:lnSpc>
+              <a:buNone/>
+              <a:tabLst>
+                <a:tab algn="l" pos="0"/>
+              </a:tabLst>
+              <a:defRPr b="0" lang="en-CA" sz="1400" spc="-1" strike="noStrike">
+                <a:solidFill>
+                  <a:srgbClr val="000000"/>
+                </a:solidFill>
+                <a:latin typeface="Times New Roman"/>
+              </a:defRPr>
+            </a:lvl1pPr>
+          </a:lstStyle>
+          <a:p>
+            <a:pPr indent="0" algn="ctr">
+              <a:lnSpc>
+                <a:spcPct val="100000"/>
+              </a:lnSpc>
+              <a:buNone/>
+              <a:tabLst>
+                <a:tab algn="l" pos="0"/>
+              </a:tabLst>
+            </a:pPr>
+            <a:r>
+              <a:rPr b="0" lang="en-CA" sz="1400" spc="-1" strike="noStrike">
+                <a:solidFill>
+                  <a:srgbClr val="000000"/>
+                </a:solidFill>
+                <a:latin typeface="Times New Roman"/>
+              </a:rPr>
+              <a:t>&lt;footer&gt;</a:t>
+            </a:r>
+            <a:endParaRPr b="0" lang="en-CA" sz="1400" spc="-1" strike="noStrike">
+              <a:solidFill>
+                <a:srgbClr val="000000"/>
+              </a:solidFill>
+              <a:latin typeface="Times New Roman"/>
+            </a:endParaRPr>
+          </a:p>
+        </p:txBody>
+      </p:sp>
+      <p:sp>
+        <p:nvSpPr>
+          <p:cNvPr id="3" name="PlaceHolder 3"/>
+          <p:cNvSpPr>
+            <a:spLocks noGrp="1"/>
+          </p:cNvSpPr>
+          <p:nvPr>
+            <p:ph type="sldNum" idx="2"/>
           </p:nvPr>
         </p:nvSpPr>
         <p:spPr>
           <a:xfrm>
-            <a:off x="504000" y="6886800"/>
-            <a:ext cx="2348280" cy="520920"/>
+            <a:off x="7227360" y="6886800"/>
+            <a:ext cx="2347920" cy="520560"/>
           </a:xfrm>
           <a:prstGeom prst="rect">
             <a:avLst/>
@@ -509,32 +465,44 @@
             <a:noAutofit/>
           </a:bodyPr>
           <a:lstStyle>
-            <a:lvl1pPr indent="0">
+            <a:lvl1pPr indent="0" algn="r">
+              <a:lnSpc>
+                <a:spcPct val="100000"/>
+              </a:lnSpc>
               <a:buNone/>
+              <a:tabLst>
+                <a:tab algn="l" pos="0"/>
+              </a:tabLst>
               <a:defRPr b="0" lang="en-CA" sz="1400" spc="-1" strike="noStrike">
                 <a:solidFill>
-                  <a:srgbClr val="ffffff"/>
+                  <a:srgbClr val="000000"/>
                 </a:solidFill>
                 <a:latin typeface="Times New Roman"/>
               </a:defRPr>
             </a:lvl1pPr>
           </a:lstStyle>
           <a:p>
-            <a:pPr indent="0">
+            <a:pPr indent="0" algn="r">
+              <a:lnSpc>
+                <a:spcPct val="100000"/>
+              </a:lnSpc>
               <a:buNone/>
-            </a:pPr>
-            <a:r>
+              <a:tabLst>
+                <a:tab algn="l" pos="0"/>
+              </a:tabLst>
+            </a:pPr>
+            <a:fld id="{9EF2A948-1FF3-402E-8B6C-0BC45F09D7E3}" type="slidenum">
               <a:rPr b="0" lang="en-CA" sz="1400" spc="-1" strike="noStrike">
                 <a:solidFill>
-                  <a:srgbClr val="ffffff"/>
+                  <a:srgbClr val="000000"/>
                 </a:solidFill>
                 <a:latin typeface="Times New Roman"/>
               </a:rPr>
-              <a:t>&lt;date/time&gt;</a:t>
-            </a:r>
+              <a:t>&lt;number&gt;</a:t>
+            </a:fld>
             <a:endParaRPr b="0" lang="en-CA" sz="1400" spc="-1" strike="noStrike">
               <a:solidFill>
-                <a:srgbClr val="ffffff"/>
+                <a:srgbClr val="000000"/>
               </a:solidFill>
               <a:latin typeface="Times New Roman"/>
             </a:endParaRPr>
@@ -543,18 +511,18 @@
       </p:sp>
       <p:sp>
         <p:nvSpPr>
-          <p:cNvPr id="3" name="PlaceHolder 4"/>
-          <p:cNvSpPr>
-            <a:spLocks noGrp="1"/>
-          </p:cNvSpPr>
-          <p:nvPr>
-            <p:ph type="ftr" idx="2"/>
+          <p:cNvPr id="4" name="PlaceHolder 4"/>
+          <p:cNvSpPr>
+            <a:spLocks noGrp="1"/>
+          </p:cNvSpPr>
+          <p:nvPr>
+            <p:ph type="dt" idx="3"/>
           </p:nvPr>
         </p:nvSpPr>
         <p:spPr>
           <a:xfrm>
-            <a:off x="3447360" y="6886800"/>
-            <a:ext cx="3195000" cy="520920"/>
+            <a:off x="504000" y="6886800"/>
+            <a:ext cx="2347920" cy="520560"/>
           </a:xfrm>
           <a:prstGeom prst="rect">
             <a:avLst/>
@@ -569,32 +537,32 @@
             <a:noAutofit/>
           </a:bodyPr>
           <a:lstStyle>
-            <a:lvl1pPr indent="0" algn="ctr">
+            <a:lvl1pPr indent="0">
               <a:buNone/>
               <a:defRPr b="0" lang="en-CA" sz="1400" spc="-1" strike="noStrike">
                 <a:solidFill>
-                  <a:srgbClr val="ffffff"/>
+                  <a:srgbClr val="000000"/>
                 </a:solidFill>
                 <a:latin typeface="Times New Roman"/>
               </a:defRPr>
             </a:lvl1pPr>
           </a:lstStyle>
           <a:p>
-            <a:pPr indent="0" algn="ctr">
+            <a:pPr indent="0">
               <a:buNone/>
             </a:pPr>
             <a:r>
               <a:rPr b="0" lang="en-CA" sz="1400" spc="-1" strike="noStrike">
                 <a:solidFill>
-                  <a:srgbClr val="ffffff"/>
+                  <a:srgbClr val="000000"/>
                 </a:solidFill>
                 <a:latin typeface="Times New Roman"/>
               </a:rPr>
-              <a:t>&lt;footer&gt;</a:t>
+              <a:t>&lt;date/time&gt;</a:t>
             </a:r>
             <a:endParaRPr b="0" lang="en-CA" sz="1400" spc="-1" strike="noStrike">
               <a:solidFill>
-                <a:srgbClr val="ffffff"/>
+                <a:srgbClr val="000000"/>
               </a:solidFill>
               <a:latin typeface="Times New Roman"/>
             </a:endParaRPr>
@@ -603,18 +571,18 @@
       </p:sp>
       <p:sp>
         <p:nvSpPr>
-          <p:cNvPr id="4" name="PlaceHolder 5"/>
-          <p:cNvSpPr>
-            <a:spLocks noGrp="1"/>
-          </p:cNvSpPr>
-          <p:nvPr>
-            <p:ph type="sldNum" idx="3"/>
+          <p:cNvPr id="5" name="PlaceHolder 5"/>
+          <p:cNvSpPr>
+            <a:spLocks noGrp="1"/>
+          </p:cNvSpPr>
+          <p:nvPr>
+            <p:ph type="body"/>
           </p:nvPr>
         </p:nvSpPr>
         <p:spPr>
           <a:xfrm>
-            <a:off x="7227360" y="6886800"/>
-            <a:ext cx="2348280" cy="520920"/>
+            <a:off x="504000" y="1768680"/>
+            <a:ext cx="9072000" cy="4384080"/>
           </a:xfrm>
           <a:prstGeom prst="rect">
             <a:avLst/>
@@ -626,69 +594,212 @@
         </p:spPr>
         <p:txBody>
           <a:bodyPr lIns="0" rIns="0" tIns="0" bIns="0" anchor="t">
-            <a:noAutofit/>
+            <a:normAutofit/>
           </a:bodyPr>
-          <a:lstStyle>
-            <a:lvl1pPr indent="0" algn="r">
-              <a:buNone/>
-              <a:defRPr b="0" lang="en-CA" sz="1400" spc="-1" strike="noStrike">
-                <a:solidFill>
-                  <a:srgbClr val="ffffff"/>
-                </a:solidFill>
-                <a:latin typeface="Times New Roman"/>
-              </a:defRPr>
-            </a:lvl1pPr>
-          </a:lstStyle>
-          <a:p>
-            <a:pPr indent="0" algn="r">
-              <a:buNone/>
-            </a:pPr>
-            <a:fld id="{A210F2F7-BB75-45C5-9561-59209842C42C}" type="slidenum">
-              <a:rPr b="0" lang="en-CA" sz="1400" spc="-1" strike="noStrike">
-                <a:solidFill>
-                  <a:srgbClr val="ffffff"/>
-                </a:solidFill>
-                <a:latin typeface="Times New Roman"/>
-              </a:rPr>
-              <a:t>&lt;number&gt;</a:t>
-            </a:fld>
-            <a:endParaRPr b="0" lang="en-CA" sz="1400" spc="-1" strike="noStrike">
-              <a:solidFill>
-                <a:srgbClr val="ffffff"/>
-              </a:solidFill>
-              <a:latin typeface="Times New Roman"/>
-            </a:endParaRPr>
-          </a:p>
-        </p:txBody>
-      </p:sp>
-      <p:pic>
-        <p:nvPicPr>
-          <p:cNvPr id="5" name="" descr=""/>
-          <p:cNvPicPr/>
-          <p:nvPr/>
-        </p:nvPicPr>
-        <p:blipFill>
-          <a:blip r:embed="rId2"/>
-          <a:stretch/>
-        </p:blipFill>
-        <p:spPr>
-          <a:xfrm>
-            <a:off x="8834400" y="6660000"/>
-            <a:ext cx="902880" cy="540000"/>
-          </a:xfrm>
-          <a:prstGeom prst="rect">
-            <a:avLst/>
-          </a:prstGeom>
-          <a:ln w="0">
-            <a:noFill/>
-          </a:ln>
-        </p:spPr>
-      </p:pic>
+          <a:p>
+            <a:pPr marL="432000" indent="-324000">
+              <a:spcBef>
+                <a:spcPts val="1417"/>
+              </a:spcBef>
+              <a:buClr>
+                <a:srgbClr val="000000"/>
+              </a:buClr>
+              <a:buSzPct val="45000"/>
+              <a:buFont typeface="Wingdings" charset="2"/>
+              <a:buChar char=""/>
+            </a:pPr>
+            <a:r>
+              <a:rPr b="0" lang="en-CA" sz="3200" spc="-1" strike="noStrike">
+                <a:solidFill>
+                  <a:srgbClr val="000000"/>
+                </a:solidFill>
+                <a:latin typeface="Arial"/>
+              </a:rPr>
+              <a:t>Click to edit the outline text format</a:t>
+            </a:r>
+            <a:endParaRPr b="0" lang="en-CA" sz="3200" spc="-1" strike="noStrike">
+              <a:solidFill>
+                <a:srgbClr val="000000"/>
+              </a:solidFill>
+              <a:latin typeface="Arial"/>
+            </a:endParaRPr>
+          </a:p>
+          <a:p>
+            <a:pPr lvl="1" marL="864000" indent="-324000">
+              <a:spcBef>
+                <a:spcPts val="1134"/>
+              </a:spcBef>
+              <a:buClr>
+                <a:srgbClr val="000000"/>
+              </a:buClr>
+              <a:buSzPct val="75000"/>
+              <a:buFont typeface="Symbol" charset="2"/>
+              <a:buChar char=""/>
+            </a:pPr>
+            <a:r>
+              <a:rPr b="0" lang="en-CA" sz="2800" spc="-1" strike="noStrike">
+                <a:solidFill>
+                  <a:srgbClr val="000000"/>
+                </a:solidFill>
+                <a:latin typeface="Arial"/>
+              </a:rPr>
+              <a:t>Second Outline Level</a:t>
+            </a:r>
+            <a:endParaRPr b="0" lang="en-CA" sz="2800" spc="-1" strike="noStrike">
+              <a:solidFill>
+                <a:srgbClr val="000000"/>
+              </a:solidFill>
+              <a:latin typeface="Arial"/>
+            </a:endParaRPr>
+          </a:p>
+          <a:p>
+            <a:pPr lvl="2" marL="1296000" indent="-288000">
+              <a:spcBef>
+                <a:spcPts val="850"/>
+              </a:spcBef>
+              <a:buClr>
+                <a:srgbClr val="000000"/>
+              </a:buClr>
+              <a:buSzPct val="45000"/>
+              <a:buFont typeface="Wingdings" charset="2"/>
+              <a:buChar char=""/>
+            </a:pPr>
+            <a:r>
+              <a:rPr b="0" lang="en-CA" sz="2400" spc="-1" strike="noStrike">
+                <a:solidFill>
+                  <a:srgbClr val="000000"/>
+                </a:solidFill>
+                <a:latin typeface="Arial"/>
+              </a:rPr>
+              <a:t>Third Outline Level</a:t>
+            </a:r>
+            <a:endParaRPr b="0" lang="en-CA" sz="2400" spc="-1" strike="noStrike">
+              <a:solidFill>
+                <a:srgbClr val="000000"/>
+              </a:solidFill>
+              <a:latin typeface="Arial"/>
+            </a:endParaRPr>
+          </a:p>
+          <a:p>
+            <a:pPr lvl="3" marL="1728000" indent="-216000">
+              <a:spcBef>
+                <a:spcPts val="567"/>
+              </a:spcBef>
+              <a:buClr>
+                <a:srgbClr val="000000"/>
+              </a:buClr>
+              <a:buSzPct val="75000"/>
+              <a:buFont typeface="Symbol" charset="2"/>
+              <a:buChar char=""/>
+            </a:pPr>
+            <a:r>
+              <a:rPr b="0" lang="en-CA" sz="2000" spc="-1" strike="noStrike">
+                <a:solidFill>
+                  <a:srgbClr val="000000"/>
+                </a:solidFill>
+                <a:latin typeface="Arial"/>
+              </a:rPr>
+              <a:t>Fourth Outline Level</a:t>
+            </a:r>
+            <a:endParaRPr b="0" lang="en-CA" sz="2000" spc="-1" strike="noStrike">
+              <a:solidFill>
+                <a:srgbClr val="000000"/>
+              </a:solidFill>
+              <a:latin typeface="Arial"/>
+            </a:endParaRPr>
+          </a:p>
+          <a:p>
+            <a:pPr lvl="4" marL="2160000" indent="-216000">
+              <a:spcBef>
+                <a:spcPts val="283"/>
+              </a:spcBef>
+              <a:buClr>
+                <a:srgbClr val="000000"/>
+              </a:buClr>
+              <a:buSzPct val="45000"/>
+              <a:buFont typeface="Wingdings" charset="2"/>
+              <a:buChar char=""/>
+            </a:pPr>
+            <a:r>
+              <a:rPr b="0" lang="en-CA" sz="2000" spc="-1" strike="noStrike">
+                <a:solidFill>
+                  <a:srgbClr val="000000"/>
+                </a:solidFill>
+                <a:latin typeface="Arial"/>
+              </a:rPr>
+              <a:t>Fifth Outline Level</a:t>
+            </a:r>
+            <a:endParaRPr b="0" lang="en-CA" sz="2000" spc="-1" strike="noStrike">
+              <a:solidFill>
+                <a:srgbClr val="000000"/>
+              </a:solidFill>
+              <a:latin typeface="Arial"/>
+            </a:endParaRPr>
+          </a:p>
+          <a:p>
+            <a:pPr lvl="5" marL="2592000" indent="-216000">
+              <a:spcBef>
+                <a:spcPts val="283"/>
+              </a:spcBef>
+              <a:buClr>
+                <a:srgbClr val="000000"/>
+              </a:buClr>
+              <a:buSzPct val="45000"/>
+              <a:buFont typeface="Wingdings" charset="2"/>
+              <a:buChar char=""/>
+            </a:pPr>
+            <a:r>
+              <a:rPr b="0" lang="en-CA" sz="2000" spc="-1" strike="noStrike">
+                <a:solidFill>
+                  <a:srgbClr val="000000"/>
+                </a:solidFill>
+                <a:latin typeface="Arial"/>
+              </a:rPr>
+              <a:t>Sixth Outline Level</a:t>
+            </a:r>
+            <a:endParaRPr b="0" lang="en-CA" sz="2000" spc="-1" strike="noStrike">
+              <a:solidFill>
+                <a:srgbClr val="000000"/>
+              </a:solidFill>
+              <a:latin typeface="Arial"/>
+            </a:endParaRPr>
+          </a:p>
+          <a:p>
+            <a:pPr lvl="6" marL="3024000" indent="-216000">
+              <a:spcBef>
+                <a:spcPts val="283"/>
+              </a:spcBef>
+              <a:buClr>
+                <a:srgbClr val="000000"/>
+              </a:buClr>
+              <a:buSzPct val="45000"/>
+              <a:buFont typeface="Wingdings" charset="2"/>
+              <a:buChar char=""/>
+            </a:pPr>
+            <a:r>
+              <a:rPr b="0" lang="en-CA" sz="2000" spc="-1" strike="noStrike">
+                <a:solidFill>
+                  <a:srgbClr val="000000"/>
+                </a:solidFill>
+                <a:latin typeface="Arial"/>
+              </a:rPr>
+              <a:t>Seventh Outline Level</a:t>
+            </a:r>
+            <a:endParaRPr b="0" lang="en-CA" sz="2000" spc="-1" strike="noStrike">
+              <a:solidFill>
+                <a:srgbClr val="000000"/>
+              </a:solidFill>
+              <a:latin typeface="Arial"/>
+            </a:endParaRPr>
+          </a:p>
+        </p:txBody>
+      </p:sp>
     </p:spTree>
   </p:cSld>
   <p:clrMap bg1="lt1" bg2="lt2" tx1="dk1" tx2="dk2" accent1="accent1" accent2="accent2" accent3="accent3" accent4="accent4" accent5="accent5" accent6="accent6" hlink="hlink" folHlink="folHlink"/>
   <p:sldLayoutIdLst>
     <p:sldLayoutId id="2147483649" r:id="rId3"/>
+    <p:sldLayoutId id="2147483650" r:id="rId4"/>
   </p:sldLayoutIdLst>
 </p:sldMaster>
 </file>
@@ -710,86 +821,6 @@
           <a:chExt cx="0" cy="0"/>
         </a:xfrm>
       </p:grpSpPr>
-      <p:sp>
-        <p:nvSpPr>
-          <p:cNvPr id="8" name="PlaceHolder 1"/>
-          <p:cNvSpPr>
-            <a:spLocks noGrp="1"/>
-          </p:cNvSpPr>
-          <p:nvPr>
-            <p:ph type="title"/>
-          </p:nvPr>
-        </p:nvSpPr>
-        <p:spPr>
-          <a:xfrm>
-            <a:off x="504000" y="301320"/>
-            <a:ext cx="9071640" cy="1261800"/>
-          </a:xfrm>
-          <a:prstGeom prst="rect">
-            <a:avLst/>
-          </a:prstGeom>
-          <a:noFill/>
-          <a:ln w="0">
-            <a:noFill/>
-          </a:ln>
-        </p:spPr>
-        <p:txBody>
-          <a:bodyPr lIns="0" rIns="0" tIns="0" bIns="0" anchor="ctr">
-            <a:noAutofit/>
-          </a:bodyPr>
-          <a:p>
-            <a:pPr indent="0" algn="ctr">
-              <a:buNone/>
-            </a:pPr>
-            <a:endParaRPr b="0" lang="en-CA" sz="5860" spc="-1" strike="noStrike">
-              <a:solidFill>
-                <a:srgbClr val="ffffff"/>
-              </a:solidFill>
-              <a:latin typeface="Arial"/>
-            </a:endParaRPr>
-          </a:p>
-        </p:txBody>
-      </p:sp>
-      <p:sp>
-        <p:nvSpPr>
-          <p:cNvPr id="9" name="PlaceHolder 2"/>
-          <p:cNvSpPr>
-            <a:spLocks noGrp="1"/>
-          </p:cNvSpPr>
-          <p:nvPr>
-            <p:ph type="subTitle"/>
-          </p:nvPr>
-        </p:nvSpPr>
-        <p:spPr>
-          <a:xfrm>
-            <a:off x="504000" y="1768680"/>
-            <a:ext cx="9071640" cy="4384440"/>
-          </a:xfrm>
-          <a:prstGeom prst="rect">
-            <a:avLst/>
-          </a:prstGeom>
-          <a:noFill/>
-          <a:ln w="0">
-            <a:noFill/>
-          </a:ln>
-        </p:spPr>
-        <p:txBody>
-          <a:bodyPr lIns="0" rIns="0" tIns="0" bIns="0" anchor="ctr">
-            <a:noAutofit/>
-          </a:bodyPr>
-          <a:p>
-            <a:pPr indent="0" algn="ctr">
-              <a:buNone/>
-            </a:pPr>
-            <a:endParaRPr b="0" lang="en-CA" sz="4270" spc="-1" strike="noStrike">
-              <a:solidFill>
-                <a:srgbClr val="ffffff"/>
-              </a:solidFill>
-              <a:latin typeface="Arial"/>
-            </a:endParaRPr>
-          </a:p>
-        </p:txBody>
-      </p:sp>
     </p:spTree>
   </p:cSld>
   <mc:AlternateContent>
